--- a/강의자료/06차시_append_extend.pptx
+++ b/강의자료/06차시_append_extend.pptx
@@ -5982,12 +5982,12 @@
         </p:nvSpPr>
         <p:spPr>
           <a:xfrm>
-            <a:off x="457200" y="3429000"/>
-            <a:ext cx="8229600" cy="1097280"/>
+            <a:off x="457200" y="3154680"/>
+            <a:ext cx="8229600" cy="1371600"/>
           </a:xfrm>
           <a:prstGeom prst="roundRect">
             <a:avLst>
-              <a:gd name="adj" fmla="val 6667"/>
+              <a:gd name="adj" fmla="val 5333"/>
             </a:avLst>
           </a:prstGeom>
           <a:solidFill>
@@ -6009,8 +6009,8 @@
         </p:nvSpPr>
         <p:spPr>
           <a:xfrm>
-            <a:off x="621792" y="3538728"/>
-            <a:ext cx="7900416" cy="877824"/>
+            <a:off x="621792" y="3264408"/>
+            <a:ext cx="7900416" cy="1152144"/>
           </a:xfrm>
           <a:prstGeom prst="rect">
             <a:avLst/>
@@ -6278,11 +6278,11 @@
         <p:spPr>
           <a:xfrm>
             <a:off x="457200" y="1371600"/>
-            <a:ext cx="5120640" cy="2377440"/>
+            <a:ext cx="5120640" cy="2240280"/>
           </a:xfrm>
           <a:prstGeom prst="roundRect">
             <a:avLst>
-              <a:gd name="adj" fmla="val 3077"/>
+              <a:gd name="adj" fmla="val 3265"/>
             </a:avLst>
           </a:prstGeom>
           <a:solidFill>
@@ -6305,7 +6305,7 @@
         <p:spPr>
           <a:xfrm>
             <a:off x="621792" y="1481328"/>
-            <a:ext cx="4791456" cy="2157984"/>
+            <a:ext cx="4791456" cy="2020824"/>
           </a:xfrm>
           <a:prstGeom prst="rect">
             <a:avLst/>
@@ -6324,7 +6324,7 @@
               <a:buNone/>
             </a:pPr>
             <a:r>
-              <a:rPr lang="en-US" sz="1250" dirty="0">
+              <a:rPr lang="en-US" sz="1376" dirty="0">
                 <a:solidFill>
                   <a:srgbClr val="E5E7EB"/>
                 </a:solidFill>
@@ -6340,17 +6340,17 @@
               </a:lnSpc>
               <a:buNone/>
             </a:pPr>
-            <a:endParaRPr lang="en-US" sz="1250" dirty="0"/>
-          </a:p>
-          <a:p>
-            <a:pPr indent="0" marL="0">
-              <a:lnSpc>
-                <a:spcPct val="115000"/>
-              </a:lnSpc>
-              <a:buNone/>
-            </a:pPr>
-            <a:r>
-              <a:rPr lang="en-US" sz="1250" b="1" dirty="0">
+            <a:endParaRPr lang="en-US" sz="1376" dirty="0"/>
+          </a:p>
+          <a:p>
+            <a:pPr indent="0" marL="0">
+              <a:lnSpc>
+                <a:spcPct val="115000"/>
+              </a:lnSpc>
+              <a:buNone/>
+            </a:pPr>
+            <a:r>
+              <a:rPr lang="en-US" sz="1376" b="1" dirty="0">
                 <a:solidFill>
                   <a:srgbClr val="93C5FD"/>
                 </a:solidFill>
@@ -6367,7 +6367,7 @@
               <a:buNone/>
             </a:pPr>
             <a:r>
-              <a:rPr lang="en-US" sz="1250" dirty="0">
+              <a:rPr lang="en-US" sz="1376" dirty="0">
                 <a:solidFill>
                   <a:srgbClr val="E5E7EB"/>
                 </a:solidFill>
@@ -6384,7 +6384,7 @@
               <a:buNone/>
             </a:pPr>
             <a:r>
-              <a:rPr lang="en-US" sz="1250" b="1" dirty="0">
+              <a:rPr lang="en-US" sz="1376" b="1" dirty="0">
                 <a:solidFill>
                   <a:srgbClr val="93C5FD"/>
                 </a:solidFill>
@@ -6401,7 +6401,7 @@
               <a:buNone/>
             </a:pPr>
             <a:r>
-              <a:rPr lang="en-US" sz="1250" dirty="0">
+              <a:rPr lang="en-US" sz="1376" dirty="0">
                 <a:solidFill>
                   <a:srgbClr val="E5E7EB"/>
                 </a:solidFill>
@@ -6418,7 +6418,7 @@
               <a:buNone/>
             </a:pPr>
             <a:r>
-              <a:rPr lang="en-US" sz="1250" b="1" dirty="0">
+              <a:rPr lang="en-US" sz="1376" b="1" dirty="0">
                 <a:solidFill>
                   <a:srgbClr val="93C5FD"/>
                 </a:solidFill>
@@ -6435,7 +6435,7 @@
               <a:buNone/>
             </a:pPr>
             <a:r>
-              <a:rPr lang="en-US" sz="1250" dirty="0">
+              <a:rPr lang="en-US" sz="1376" dirty="0">
                 <a:solidFill>
                   <a:srgbClr val="E5E7EB"/>
                 </a:solidFill>
@@ -6451,17 +6451,17 @@
               </a:lnSpc>
               <a:buNone/>
             </a:pPr>
-            <a:endParaRPr lang="en-US" sz="1250" dirty="0"/>
-          </a:p>
-          <a:p>
-            <a:pPr indent="0" marL="0">
-              <a:lnSpc>
-                <a:spcPct val="115000"/>
-              </a:lnSpc>
-              <a:buNone/>
-            </a:pPr>
-            <a:r>
-              <a:rPr lang="en-US" sz="1250" dirty="0">
+            <a:endParaRPr lang="en-US" sz="1376" dirty="0"/>
+          </a:p>
+          <a:p>
+            <a:pPr indent="0" marL="0">
+              <a:lnSpc>
+                <a:spcPct val="115000"/>
+              </a:lnSpc>
+              <a:buNone/>
+            </a:pPr>
+            <a:r>
+              <a:rPr lang="en-US" sz="1376" dirty="0">
                 <a:solidFill>
                   <a:srgbClr val="E5E7EB"/>
                 </a:solidFill>
@@ -6469,25 +6469,25 @@
                 <a:ea typeface="Courier New" pitchFamily="34" charset="-122"/>
                 <a:cs typeface="Courier New" pitchFamily="34" charset="-120"/>
               </a:rPr>
-              <a:t>    score = 0.80 + fold * 0.02   # 모델 평가 점수라고 치자</a:t>
-            </a:r>
-            <a:pPr indent="0" marL="0">
-              <a:lnSpc>
-                <a:spcPct val="115000"/>
-              </a:lnSpc>
-              <a:buNone/>
-            </a:pPr>
-            <a:endParaRPr lang="en-US" sz="1250" dirty="0"/>
-          </a:p>
-          <a:p>
-            <a:pPr indent="0" marL="0">
-              <a:lnSpc>
-                <a:spcPct val="115000"/>
-              </a:lnSpc>
-              <a:buNone/>
-            </a:pPr>
-            <a:r>
-              <a:rPr lang="en-US" sz="1250" dirty="0">
+              <a:t>    score = 80 + fold * 2    # 폴드별 점수</a:t>
+            </a:r>
+            <a:pPr indent="0" marL="0">
+              <a:lnSpc>
+                <a:spcPct val="115000"/>
+              </a:lnSpc>
+              <a:buNone/>
+            </a:pPr>
+            <a:endParaRPr lang="en-US" sz="1376" dirty="0"/>
+          </a:p>
+          <a:p>
+            <a:pPr indent="0" marL="0">
+              <a:lnSpc>
+                <a:spcPct val="115000"/>
+              </a:lnSpc>
+              <a:buNone/>
+            </a:pPr>
+            <a:r>
+              <a:rPr lang="en-US" sz="1376" dirty="0">
                 <a:solidFill>
                   <a:srgbClr val="E5E7EB"/>
                 </a:solidFill>
@@ -6503,17 +6503,17 @@
               </a:lnSpc>
               <a:buNone/>
             </a:pPr>
-            <a:endParaRPr lang="en-US" sz="1250" dirty="0"/>
-          </a:p>
-          <a:p>
-            <a:pPr indent="0" marL="0">
-              <a:lnSpc>
-                <a:spcPct val="115000"/>
-              </a:lnSpc>
-              <a:buNone/>
-            </a:pPr>
-            <a:r>
-              <a:rPr lang="en-US" sz="1250" b="1" dirty="0">
+            <a:endParaRPr lang="en-US" sz="1376" dirty="0"/>
+          </a:p>
+          <a:p>
+            <a:pPr indent="0" marL="0">
+              <a:lnSpc>
+                <a:spcPct val="115000"/>
+              </a:lnSpc>
+              <a:buNone/>
+            </a:pPr>
+            <a:r>
+              <a:rPr lang="en-US" sz="1376" b="1" dirty="0">
                 <a:solidFill>
                   <a:srgbClr val="93C5FD"/>
                 </a:solidFill>
@@ -6530,7 +6530,7 @@
               <a:buNone/>
             </a:pPr>
             <a:r>
-              <a:rPr lang="en-US" sz="1250" dirty="0">
+              <a:rPr lang="en-US" sz="1376" dirty="0">
                 <a:solidFill>
                   <a:srgbClr val="E5E7EB"/>
                 </a:solidFill>
@@ -6546,17 +6546,17 @@
               </a:lnSpc>
               <a:buNone/>
             </a:pPr>
-            <a:endParaRPr lang="en-US" sz="1250" dirty="0"/>
-          </a:p>
-          <a:p>
-            <a:pPr indent="0" marL="0">
-              <a:lnSpc>
-                <a:spcPct val="115000"/>
-              </a:lnSpc>
-              <a:buNone/>
-            </a:pPr>
-            <a:r>
-              <a:rPr lang="en-US" sz="1250" b="1" dirty="0">
+            <a:endParaRPr lang="en-US" sz="1376" dirty="0"/>
+          </a:p>
+          <a:p>
+            <a:pPr indent="0" marL="0">
+              <a:lnSpc>
+                <a:spcPct val="115000"/>
+              </a:lnSpc>
+              <a:buNone/>
+            </a:pPr>
+            <a:r>
+              <a:rPr lang="en-US" sz="1376" b="1" dirty="0">
                 <a:solidFill>
                   <a:srgbClr val="93C5FD"/>
                 </a:solidFill>
@@ -6573,7 +6573,7 @@
               <a:buNone/>
             </a:pPr>
             <a:r>
-              <a:rPr lang="en-US" sz="1250" dirty="0">
+              <a:rPr lang="en-US" sz="1376" dirty="0">
                 <a:solidFill>
                   <a:srgbClr val="E5E7EB"/>
                 </a:solidFill>
@@ -6590,7 +6590,7 @@
               <a:buNone/>
             </a:pPr>
             <a:r>
-              <a:rPr lang="en-US" sz="1250" dirty="0">
+              <a:rPr lang="en-US" sz="1376" dirty="0">
                 <a:solidFill>
                   <a:srgbClr val="FCD34D"/>
                 </a:solidFill>
@@ -6607,7 +6607,7 @@
               <a:buNone/>
             </a:pPr>
             <a:r>
-              <a:rPr lang="en-US" sz="1250" dirty="0">
+              <a:rPr lang="en-US" sz="1376" dirty="0">
                 <a:solidFill>
                   <a:srgbClr val="E5E7EB"/>
                 </a:solidFill>
@@ -6624,7 +6624,7 @@
               <a:buNone/>
             </a:pPr>
             <a:r>
-              <a:rPr lang="en-US" sz="1250" b="1" dirty="0">
+              <a:rPr lang="en-US" sz="1376" b="1" dirty="0">
                 <a:solidFill>
                   <a:srgbClr val="93C5FD"/>
                 </a:solidFill>
@@ -6641,7 +6641,7 @@
               <a:buNone/>
             </a:pPr>
             <a:r>
-              <a:rPr lang="en-US" sz="1250" dirty="0">
+              <a:rPr lang="en-US" sz="1376" dirty="0">
                 <a:solidFill>
                   <a:srgbClr val="E5E7EB"/>
                 </a:solidFill>
@@ -6651,7 +6651,7 @@
               </a:rPr>
               <a:t>(scores))</a:t>
             </a:r>
-            <a:endParaRPr lang="en-US" sz="1250" dirty="0"/>
+            <a:endParaRPr lang="en-US" sz="1376" dirty="0"/>
           </a:p>
         </p:txBody>
       </p:sp>
@@ -6663,12 +6663,12 @@
         </p:nvSpPr>
         <p:spPr>
           <a:xfrm>
-            <a:off x="457200" y="3886200"/>
-            <a:ext cx="5120640" cy="822960"/>
+            <a:off x="457200" y="3749040"/>
+            <a:ext cx="5120640" cy="960120"/>
           </a:xfrm>
           <a:prstGeom prst="roundRect">
             <a:avLst>
-              <a:gd name="adj" fmla="val 8889"/>
+              <a:gd name="adj" fmla="val 7619"/>
             </a:avLst>
           </a:prstGeom>
           <a:solidFill>
@@ -6690,7 +6690,7 @@
         </p:nvSpPr>
         <p:spPr>
           <a:xfrm>
-            <a:off x="621792" y="3959352"/>
+            <a:off x="621792" y="3822192"/>
             <a:ext cx="1828800" cy="228600"/>
           </a:xfrm>
           <a:prstGeom prst="rect">
@@ -6729,8 +6729,8 @@
         </p:nvSpPr>
         <p:spPr>
           <a:xfrm>
-            <a:off x="621792" y="4215384"/>
-            <a:ext cx="4791456" cy="420624"/>
+            <a:off x="621792" y="4078224"/>
+            <a:ext cx="4791456" cy="557784"/>
           </a:xfrm>
           <a:prstGeom prst="rect">
             <a:avLst/>
@@ -6749,7 +6749,7 @@
               <a:buNone/>
             </a:pPr>
             <a:r>
-              <a:rPr lang="en-US" sz="1100" dirty="0">
+              <a:rPr lang="en-US" sz="1282" dirty="0">
                 <a:solidFill>
                   <a:srgbClr val="0F172A"/>
                 </a:solidFill>
@@ -6757,19 +6757,19 @@
                 <a:ea typeface="Courier New" pitchFamily="34" charset="-122"/>
                 <a:cs typeface="Courier New" pitchFamily="34" charset="-120"/>
               </a:rPr>
-              <a:t>[0.8, 0.82, 0.84, 0.86, 0.88]</a:t>
-            </a:r>
-            <a:endParaRPr lang="en-US" sz="1100" dirty="0"/>
-          </a:p>
-          <a:p>
-            <a:pPr indent="0" marL="0">
-              <a:lnSpc>
-                <a:spcPct val="115000"/>
-              </a:lnSpc>
-              <a:buNone/>
-            </a:pPr>
-            <a:r>
-              <a:rPr lang="en-US" sz="1100" dirty="0">
+              <a:t>[80, 82, 84, 86, 88]</a:t>
+            </a:r>
+            <a:endParaRPr lang="en-US" sz="1282" dirty="0"/>
+          </a:p>
+          <a:p>
+            <a:pPr indent="0" marL="0">
+              <a:lnSpc>
+                <a:spcPct val="115000"/>
+              </a:lnSpc>
+              <a:buNone/>
+            </a:pPr>
+            <a:r>
+              <a:rPr lang="en-US" sz="1282" dirty="0">
                 <a:solidFill>
                   <a:srgbClr val="0F172A"/>
                 </a:solidFill>
@@ -6777,9 +6777,9 @@
                 <a:ea typeface="Courier New" pitchFamily="34" charset="-122"/>
                 <a:cs typeface="Courier New" pitchFamily="34" charset="-120"/>
               </a:rPr>
-              <a:t>평균: 0.84</a:t>
-            </a:r>
-            <a:endParaRPr lang="en-US" sz="1100" dirty="0"/>
+              <a:t>평균: 84.0</a:t>
+            </a:r>
+            <a:endParaRPr lang="en-US" sz="1282" dirty="0"/>
           </a:p>
         </p:txBody>
       </p:sp>
@@ -7512,12 +7512,12 @@
         </p:nvSpPr>
         <p:spPr>
           <a:xfrm>
-            <a:off x="457200" y="3291840"/>
-            <a:ext cx="8229600" cy="1371600"/>
+            <a:off x="457200" y="3017520"/>
+            <a:ext cx="8229600" cy="1645920"/>
           </a:xfrm>
           <a:prstGeom prst="roundRect">
             <a:avLst>
-              <a:gd name="adj" fmla="val 6667"/>
+              <a:gd name="adj" fmla="val 5556"/>
             </a:avLst>
           </a:prstGeom>
           <a:solidFill>
@@ -7539,7 +7539,7 @@
         </p:nvSpPr>
         <p:spPr>
           <a:xfrm>
-            <a:off x="685800" y="3456432"/>
+            <a:off x="685800" y="3182112"/>
             <a:ext cx="7772400" cy="365760"/>
           </a:xfrm>
           <a:prstGeom prst="rect">
@@ -7578,8 +7578,8 @@
         </p:nvSpPr>
         <p:spPr>
           <a:xfrm>
-            <a:off x="685800" y="3840480"/>
-            <a:ext cx="7772400" cy="685800"/>
+            <a:off x="685800" y="3566160"/>
+            <a:ext cx="7772400" cy="960120"/>
           </a:xfrm>
           <a:prstGeom prst="rect">
             <a:avLst/>
@@ -7606,7 +7606,27 @@
                 <a:ea typeface="Malgun Gothic" pitchFamily="34" charset="-122"/>
                 <a:cs typeface="Malgun Gothic" pitchFamily="34" charset="-120"/>
               </a:rPr>
-              <a:t>박스를 4개로 올렸을 때 extend 대신 append 를 쓰면 슬롯이 몇 개가 될까? (답: 4개 — 박스 하나가 원소 1개) 짝과 답을 맞춰 보세요.</a:t>
+              <a:t>박스를 4개로 올렸을 때 extend 대신 append 를 쓰면 슬롯이 몇 개가 될까?</a:t>
+            </a:r>
+            <a:endParaRPr lang="en-US" sz="1250" dirty="0"/>
+          </a:p>
+          <a:p>
+            <a:pPr indent="0" marL="0">
+              <a:lnSpc>
+                <a:spcPct val="125000"/>
+              </a:lnSpc>
+              <a:buNone/>
+            </a:pPr>
+            <a:r>
+              <a:rPr lang="en-US" sz="1250" dirty="0">
+                <a:solidFill>
+                  <a:srgbClr val="334155"/>
+                </a:solidFill>
+                <a:latin typeface="Malgun Gothic" pitchFamily="34" charset="0"/>
+                <a:ea typeface="Malgun Gothic" pitchFamily="34" charset="-122"/>
+                <a:cs typeface="Malgun Gothic" pitchFamily="34" charset="-120"/>
+              </a:rPr>
+              <a:t>(답: 4개 — 박스 하나가 원소 1개로 들어간다) 짝과 답을 맞춰 보세요.</a:t>
             </a:r>
             <a:endParaRPr lang="en-US" sz="1250" dirty="0"/>
           </a:p>

--- a/강의자료/06차시_append_extend.pptx
+++ b/강의자료/06차시_append_extend.pptx
@@ -5651,7 +5651,7 @@
         <p:spPr>
           <a:xfrm>
             <a:off x="457200" y="1965960"/>
-            <a:ext cx="2590800" cy="1097280"/>
+            <a:ext cx="2590800" cy="1417320"/>
           </a:xfrm>
           <a:prstGeom prst="rect">
             <a:avLst/>
@@ -5796,7 +5796,7 @@
         <p:spPr>
           <a:xfrm>
             <a:off x="3276600" y="1965960"/>
-            <a:ext cx="2590800" cy="1097280"/>
+            <a:ext cx="2590800" cy="1417320"/>
           </a:xfrm>
           <a:prstGeom prst="rect">
             <a:avLst/>
@@ -5941,7 +5941,7 @@
         <p:spPr>
           <a:xfrm>
             <a:off x="6096000" y="1965960"/>
-            <a:ext cx="2590800" cy="1097280"/>
+            <a:ext cx="2590800" cy="1417320"/>
           </a:xfrm>
           <a:prstGeom prst="rect">
             <a:avLst/>
@@ -7166,7 +7166,7 @@
                 <a:ea typeface="Malgun Gothic" pitchFamily="34" charset="-122"/>
                 <a:cs typeface="Malgun Gothic" pitchFamily="34" charset="-120"/>
               </a:rPr>
-              <a:t>STEP 1 조립</a:t>
+              <a:t>STEP 1 코드 소환</a:t>
             </a:r>
             <a:endParaRPr lang="en-US" sz="1400" dirty="0"/>
           </a:p>
@@ -7181,7 +7181,7 @@
         <p:spPr>
           <a:xfrm>
             <a:off x="457200" y="1965960"/>
-            <a:ext cx="2590800" cy="1097280"/>
+            <a:ext cx="2590800" cy="1417320"/>
           </a:xfrm>
           <a:prstGeom prst="rect">
             <a:avLst/>
@@ -7208,7 +7208,7 @@
                 <a:ea typeface="Malgun Gothic" pitchFamily="34" charset="-122"/>
                 <a:cs typeface="Malgun Gothic" pitchFamily="34" charset="-120"/>
               </a:rPr>
-              <a:t>append 로 넣을 단일 템 하나, extend 로 풀 박스 알맹이 수를 고르고 코드를 조립한다.</a:t>
+              <a:t>「append &amp; extend 리스트 조립」 버튼을 누르면 코드가 나타난다. 다섯 줄을 소리 내어 읽는다.</a:t>
             </a:r>
             <a:endParaRPr lang="en-US" sz="1200" dirty="0"/>
           </a:p>
@@ -7311,7 +7311,7 @@
                 <a:ea typeface="Malgun Gothic" pitchFamily="34" charset="-122"/>
                 <a:cs typeface="Malgun Gothic" pitchFamily="34" charset="-120"/>
               </a:rPr>
-              <a:t>STEP 2 예측</a:t>
+              <a:t>STEP 2 파라미터 적용</a:t>
             </a:r>
             <a:endParaRPr lang="en-US" sz="1400" dirty="0"/>
           </a:p>
@@ -7326,7 +7326,7 @@
         <p:spPr>
           <a:xfrm>
             <a:off x="3276600" y="1965960"/>
-            <a:ext cx="2590800" cy="1097280"/>
+            <a:ext cx="2590800" cy="1417320"/>
           </a:xfrm>
           <a:prstGeom prst="rect">
             <a:avLst/>
@@ -7353,7 +7353,7 @@
                 <a:ea typeface="Malgun Gothic" pitchFamily="34" charset="-122"/>
                 <a:cs typeface="Malgun Gothic" pitchFamily="34" charset="-120"/>
               </a:rPr>
-              <a:t>실행 전에 '총 슬롯 개수' 를 먼저 말해 보기. 2 + 1 + 박스 수.</a:t>
+              <a:t>append 로 넣을 단일 템(전설의활·마법지팡이·방패)과 extend 박스 알맹이 수(1~4)를 고르고 「파라미터 적용」. 코드가 바뀌는 걸 본다.</a:t>
             </a:r>
             <a:endParaRPr lang="en-US" sz="1200" dirty="0"/>
           </a:p>
@@ -7456,7 +7456,7 @@
                 <a:ea typeface="Malgun Gothic" pitchFamily="34" charset="-122"/>
                 <a:cs typeface="Malgun Gothic" pitchFamily="34" charset="-120"/>
               </a:rPr>
-              <a:t>STEP 3 확인</a:t>
+              <a:t>STEP 3 실행 · 차트</a:t>
             </a:r>
             <a:endParaRPr lang="en-US" sz="1400" dirty="0"/>
           </a:p>
@@ -7471,7 +7471,7 @@
         <p:spPr>
           <a:xfrm>
             <a:off x="6096000" y="1965960"/>
-            <a:ext cx="2590800" cy="1097280"/>
+            <a:ext cx="2590800" cy="1417320"/>
           </a:xfrm>
           <a:prstGeom prst="rect">
             <a:avLst/>
@@ -7498,7 +7498,7 @@
                 <a:ea typeface="Malgun Gothic" pitchFamily="34" charset="-122"/>
                 <a:cs typeface="Malgun Gothic" pitchFamily="34" charset="-120"/>
               </a:rPr>
-              <a:t>차트의 세 막대(기본 → append 후 → extend 후)가 예측과 같은지 본다.</a:t>
+              <a:t>「파이프라인 실행」 → 막대 셋: 기본 2 → append 후 3 → extend 후 3+박스 수. 누르기 전에 마지막 숫자를 먼저 말해 보기.</a:t>
             </a:r>
             <a:endParaRPr lang="en-US" sz="1200" dirty="0"/>
           </a:p>
